--- a/daejundiai/estudo/redes-jan-set-2026/dae-redes-jan-set-2026.pptx
+++ b/daejundiai/estudo/redes-jan-set-2026/dae-redes-jan-set-2026.pptx
@@ -11,6 +11,7 @@
     <p:sldId id="259" r:id="rId5"/>
     <p:sldId id="260" r:id="rId6"/>
     <p:sldId id="261" r:id="rId7"/>
+    <p:sldId id="263" r:id="rId14"/>
     <p:sldId id="262" r:id="rId8"/>
   </p:sldIdLst>
   <p:notesMasterIdLst>
@@ -3148,15 +3149,13 @@
               <a:buNone/>
             </a:pPr>
             <a:r>
-              <a:rPr lang="en-US" sz="1000" b="1" spc="200" kern="0" dirty="0">
-                <a:solidFill>
-                  <a:srgbClr val="B8B8E7"/>
-                </a:solidFill>
-                <a:latin typeface="Aptos" pitchFamily="34" charset="0"/>
-                <a:ea typeface="Aptos" pitchFamily="34" charset="-122"/>
-                <a:cs typeface="Aptos" pitchFamily="34" charset="-120"/>
+              <a:rPr sz="1200">
+                <a:solidFill>
+                  <a:srgbClr val="AFBDF1"/>
+                </a:solidFill>
+                <a:latin typeface="Aptos"/>
               </a:rPr>
-              <a:t>DAE JUNDIAÍ | RELATÓRIO DE REDES SOCIAIS</a:t>
+              <a:t>RELATÓRIO DE REDES SOCIAIS</a:t>
             </a:r>
             <a:endParaRPr lang="en-US" sz="1000" dirty="0"/>
           </a:p>
@@ -3312,15 +3311,13 @@
               <a:buNone/>
             </a:pPr>
             <a:r>
-              <a:rPr lang="en-US" sz="1800" dirty="0">
-                <a:solidFill>
-                  <a:srgbClr val="E2E5F4"/>
-                </a:solidFill>
-                <a:latin typeface="Aptos" pitchFamily="34" charset="0"/>
-                <a:ea typeface="Aptos" pitchFamily="34" charset="-122"/>
-                <a:cs typeface="Aptos" pitchFamily="34" charset="-120"/>
+              <a:rPr sz="1800">
+                <a:solidFill>
+                  <a:srgbClr val="D8E0EF"/>
+                </a:solidFill>
+                <a:latin typeface="Aptos"/>
               </a:rPr>
-              <a:t>Evolução dos perfis institucionais do DAE Jundiaí no Instagram e no Facebook.</a:t>
+              <a:t>Evolução dos perfis institucionais no Instagram e no Facebook.</a:t>
             </a:r>
             <a:endParaRPr lang="en-US" sz="1800" dirty="0"/>
           </a:p>
@@ -3372,6 +3369,10 @@
             <a:prstDash val="solid"/>
           </a:ln>
         </p:spPr>
+        <p:txBody>
+          <a:bodyPr/>
+          <a:p/>
+        </p:txBody>
       </p:sp>
       <p:sp>
         <p:nvSpPr>
@@ -3441,17 +3442,54 @@
               <a:buNone/>
             </a:pPr>
             <a:r>
-              <a:rPr lang="en-US" sz="750" dirty="0">
-                <a:solidFill>
-                  <a:srgbClr val="C7CBE0"/>
-                </a:solidFill>
-                <a:latin typeface="Aptos" pitchFamily="34" charset="0"/>
-                <a:ea typeface="Aptos" pitchFamily="34" charset="-122"/>
-                <a:cs typeface="Aptos" pitchFamily="34" charset="-120"/>
+              <a:rPr sz="800">
+                <a:solidFill>
+                  <a:srgbClr val="67738E"/>
+                </a:solidFill>
+                <a:latin typeface="Aptos"/>
               </a:rPr>
-              <a:t>Apuração: 19/10/2026 | 01 / 07</a:t>
+              <a:t>Apuração: 19/10/2026 | 01 / 08</a:t>
             </a:r>
             <a:endParaRPr lang="en-US" sz="750" dirty="0"/>
+          </a:p>
+        </p:txBody>
+      </p:sp>
+      <p:sp>
+        <p:nvSpPr>
+          <p:cNvPr id="11" name="Escopo desta edicao"/>
+          <p:cNvSpPr txBox="1"/>
+          <p:nvPr/>
+        </p:nvSpPr>
+        <p:spPr>
+          <a:xfrm>
+            <a:off x="548640" y="4855464"/>
+            <a:ext cx="10835640" cy="292608"/>
+          </a:xfrm>
+          <a:prstGeom prst="rect">
+            <a:avLst/>
+          </a:prstGeom>
+          <a:noFill/>
+        </p:spPr>
+        <p:txBody>
+          <a:bodyPr wrap="square" lIns="0" tIns="0">
+            <a:spAutoFit/>
+          </a:bodyPr>
+          <a:lstStyle/>
+          <a:p>
+            <a:pPr>
+              <a:spcAft>
+                <a:spcPts val="0"/>
+              </a:spcAft>
+            </a:pPr>
+            <a:r>
+              <a:rPr sz="1100">
+                <a:solidFill>
+                  <a:srgbClr val="D4DAEC"/>
+                </a:solidFill>
+                <a:latin typeface="Aptos"/>
+              </a:rPr>
+              <a:t>Escopo: exclusivamente os perfis institucionais do DAE Jundiaí no Instagram e Facebook.</a:t>
+            </a:r>
           </a:p>
         </p:txBody>
       </p:sp>
@@ -3632,6 +3670,10 @@
             <a:prstDash val="solid"/>
           </a:ln>
         </p:spPr>
+        <p:txBody>
+          <a:bodyPr/>
+          <a:p/>
+        </p:txBody>
       </p:sp>
       <p:sp>
         <p:nvSpPr>
@@ -3657,6 +3699,10 @@
             <a:prstDash val="solid"/>
           </a:ln>
         </p:spPr>
+        <p:txBody>
+          <a:bodyPr/>
+          <a:p/>
+        </p:txBody>
       </p:sp>
       <p:sp>
         <p:nvSpPr>
@@ -3764,6 +3810,10 @@
             <a:prstDash val="solid"/>
           </a:ln>
         </p:spPr>
+        <p:txBody>
+          <a:bodyPr/>
+          <a:p/>
+        </p:txBody>
       </p:sp>
       <p:sp>
         <p:nvSpPr>
@@ -3871,6 +3921,10 @@
             <a:prstDash val="solid"/>
           </a:ln>
         </p:spPr>
+        <p:txBody>
+          <a:bodyPr/>
+          <a:p/>
+        </p:txBody>
       </p:sp>
       <p:sp>
         <p:nvSpPr>
@@ -3981,15 +4035,13 @@
               <a:buNone/>
             </a:pPr>
             <a:r>
-              <a:rPr lang="en-US" sz="1400" dirty="0">
-                <a:solidFill>
-                  <a:srgbClr val="586176"/>
-                </a:solidFill>
-                <a:latin typeface="Aptos" pitchFamily="34" charset="0"/>
-                <a:ea typeface="Aptos" pitchFamily="34" charset="-122"/>
-                <a:cs typeface="Aptos" pitchFamily="34" charset="-120"/>
+              <a:rPr sz="1900">
+                <a:solidFill>
+                  <a:srgbClr val="192448"/>
+                </a:solidFill>
+                <a:latin typeface="Aptos"/>
               </a:rPr>
-              <a:t>A comunicação manteve presença contínua para informar sobre serviços, infraestrutura, uso da água e espaços administrados pelo DAE. Os resultados mostram resposta do público, sem atribuir os picos a uma única publicação.</a:t>
+              <a:t>De janeiro a setembro, o conteúdo do DAE gerou 47.359 interações. Em julho começou a mídia identificada no controle; agosto reuniu investimento e os maiores resultados de distribuição, reforçando o papel conjunto de conteúdo relevante e mídia.</a:t>
             </a:r>
             <a:endParaRPr lang="en-US" sz="1400" dirty="0"/>
           </a:p>
@@ -4017,6 +4069,10 @@
             <a:prstDash val="solid"/>
           </a:ln>
         </p:spPr>
+        <p:txBody>
+          <a:bodyPr/>
+          <a:p/>
+        </p:txBody>
       </p:sp>
       <p:sp>
         <p:nvSpPr>
@@ -4086,15 +4142,13 @@
               <a:buNone/>
             </a:pPr>
             <a:r>
-              <a:rPr lang="en-US" sz="750" dirty="0">
-                <a:solidFill>
-                  <a:srgbClr val="697188"/>
-                </a:solidFill>
-                <a:latin typeface="Aptos" pitchFamily="34" charset="0"/>
-                <a:ea typeface="Aptos" pitchFamily="34" charset="-122"/>
-                <a:cs typeface="Aptos" pitchFamily="34" charset="-120"/>
+              <a:rPr sz="800">
+                <a:solidFill>
+                  <a:srgbClr val="67738E"/>
+                </a:solidFill>
+                <a:latin typeface="Aptos"/>
               </a:rPr>
-              <a:t>Apuração: 19/10/2026 | 02 / 07</a:t>
+              <a:t>Apuração: 19/10/2026 | 02 / 08</a:t>
             </a:r>
             <a:endParaRPr lang="en-US" sz="750" dirty="0"/>
           </a:p>
@@ -4200,15 +4254,13 @@
               <a:buNone/>
             </a:pPr>
             <a:r>
-              <a:rPr lang="en-US" sz="3100" b="1" dirty="0">
-                <a:solidFill>
-                  <a:srgbClr val="132044"/>
-                </a:solidFill>
-                <a:latin typeface="Aptos" pitchFamily="34" charset="0"/>
-                <a:ea typeface="Aptos" pitchFamily="34" charset="-122"/>
-                <a:cs typeface="Aptos" pitchFamily="34" charset="-120"/>
+              <a:rPr sz="3000">
+                <a:solidFill>
+                  <a:srgbClr val="192448"/>
+                </a:solidFill>
+                <a:latin typeface="Aptos"/>
               </a:rPr>
-              <a:t>A base de seguidores avançou mês a mês nos dois perfis</a:t>
+              <a:t>Seguidores: avanços em fevereiro e agosto</a:t>
             </a:r>
             <a:endParaRPr lang="en-US" sz="3100" dirty="0"/>
           </a:p>
@@ -4241,15 +4293,13 @@
               <a:buNone/>
             </a:pPr>
             <a:r>
-              <a:rPr lang="en-US" sz="1600" dirty="0">
-                <a:solidFill>
-                  <a:srgbClr val="586176"/>
-                </a:solidFill>
-                <a:latin typeface="Aptos" pitchFamily="34" charset="0"/>
-                <a:ea typeface="Aptos" pitchFamily="34" charset="-122"/>
-                <a:cs typeface="Aptos" pitchFamily="34" charset="-120"/>
+              <a:rPr sz="1500">
+                <a:solidFill>
+                  <a:srgbClr val="4C5975"/>
+                </a:solidFill>
+                <a:latin typeface="Aptos"/>
               </a:rPr>
-              <a:t>O Instagram passou de 9.358 seguidores no fim de janeiro para 12.417 em setembro. O Facebook passou de 14.084 para 14.224 no mesmo intervalo.</a:t>
+              <a:t>A maior alta mensal do Instagram foi em fevereiro (+1.094 seguidores líquidos), antes da mídia registrada. Em agosto, com mídia, houve +413 no Instagram e +34 no Facebook.</a:t>
             </a:r>
             <a:endParaRPr lang="en-US" sz="1600" dirty="0"/>
           </a:p>
@@ -4279,6 +4329,10 @@
             <a:prstDash val="solid"/>
           </a:ln>
         </p:spPr>
+        <p:txBody>
+          <a:bodyPr/>
+          <a:p/>
+        </p:txBody>
       </p:sp>
       <p:sp>
         <p:nvSpPr>
@@ -4402,6 +4456,10 @@
             <a:prstDash val="solid"/>
           </a:ln>
         </p:spPr>
+        <p:txBody>
+          <a:bodyPr/>
+          <a:p/>
+        </p:txBody>
       </p:sp>
       <p:sp>
         <p:nvSpPr>
@@ -4523,6 +4581,10 @@
             <a:prstDash val="solid"/>
           </a:ln>
         </p:spPr>
+        <p:txBody>
+          <a:bodyPr/>
+          <a:p/>
+        </p:txBody>
       </p:sp>
       <p:sp>
         <p:nvSpPr>
@@ -4592,17 +4654,96 @@
               <a:buNone/>
             </a:pPr>
             <a:r>
-              <a:rPr lang="en-US" sz="750" dirty="0">
-                <a:solidFill>
-                  <a:srgbClr val="697188"/>
-                </a:solidFill>
-                <a:latin typeface="Aptos" pitchFamily="34" charset="0"/>
-                <a:ea typeface="Aptos" pitchFamily="34" charset="-122"/>
-                <a:cs typeface="Aptos" pitchFamily="34" charset="-120"/>
+              <a:rPr sz="800">
+                <a:solidFill>
+                  <a:srgbClr val="67738E"/>
+                </a:solidFill>
+                <a:latin typeface="Aptos"/>
               </a:rPr>
-              <a:t>Apuração: 19/10/2026 | 03 / 07</a:t>
+              <a:t>Apuração: 19/10/2026 | 03 / 08</a:t>
             </a:r>
             <a:endParaRPr lang="en-US" sz="750" dirty="0"/>
+          </a:p>
+        </p:txBody>
+      </p:sp>
+      <p:sp>
+        <p:nvSpPr>
+          <p:cNvPr id="16" name="Rounded Rectangle 15"/>
+          <p:cNvSpPr/>
+          <p:nvPr/>
+        </p:nvSpPr>
+        <p:spPr>
+          <a:xfrm>
+            <a:off x="566928" y="6044184"/>
+            <a:ext cx="11018520" cy="393192"/>
+          </a:xfrm>
+          <a:prstGeom prst="roundRect">
+            <a:avLst>
+              <a:gd name="adj" fmla="val 12000"/>
+            </a:avLst>
+          </a:prstGeom>
+          <a:solidFill>
+            <a:srgbClr val="E8EDF7"/>
+          </a:solidFill>
+          <a:ln>
+            <a:noFill/>
+          </a:ln>
+        </p:spPr>
+        <p:style>
+          <a:lnRef idx="1">
+            <a:schemeClr val="accent1"/>
+          </a:lnRef>
+          <a:fillRef idx="3">
+            <a:schemeClr val="accent1"/>
+          </a:fillRef>
+          <a:effectRef idx="2">
+            <a:schemeClr val="accent1"/>
+          </a:effectRef>
+          <a:fontRef idx="minor">
+            <a:schemeClr val="lt1"/>
+          </a:fontRef>
+        </p:style>
+        <p:txBody>
+          <a:bodyPr rtlCol="0" anchor="ctr"/>
+          <a:lstStyle/>
+          <a:p>
+            <a:pPr algn="ctr"/>
+          </a:p>
+        </p:txBody>
+      </p:sp>
+      <p:sp>
+        <p:nvSpPr>
+          <p:cNvPr id="17" name="TextBox 16"/>
+          <p:cNvSpPr txBox="1"/>
+          <p:nvPr/>
+        </p:nvSpPr>
+        <p:spPr>
+          <a:xfrm>
+            <a:off x="713232" y="6126480"/>
+            <a:ext cx="10716768" cy="246888"/>
+          </a:xfrm>
+          <a:prstGeom prst="rect">
+            <a:avLst/>
+          </a:prstGeom>
+          <a:noFill/>
+        </p:spPr>
+        <p:txBody>
+          <a:bodyPr wrap="square" lIns="27432" rIns="27432" tIns="27432" bIns="27432">
+            <a:spAutoFit/>
+          </a:bodyPr>
+          <a:lstStyle/>
+          <a:p>
+            <a:pPr>
+              <a:defRPr sz="1040" b="0">
+                <a:solidFill>
+                  <a:srgbClr val="243B70"/>
+                </a:solidFill>
+                <a:latin typeface="Aptos"/>
+              </a:defRPr>
+            </a:pPr>
+            <a:r>
+              <a:t>LEITURA  |  Fevereiro: avanço sem mídia registrada. Agosto: crescimento da base durante a presença de campanhas, sem atribuição exclusiva aos anúncios.</a:t>
+            </a:r>
           </a:p>
         </p:txBody>
       </p:sp>
@@ -4706,15 +4847,13 @@
               <a:buNone/>
             </a:pPr>
             <a:r>
-              <a:rPr lang="en-US" sz="3300" b="1" dirty="0">
-                <a:solidFill>
-                  <a:srgbClr val="132044"/>
-                </a:solidFill>
-                <a:latin typeface="Aptos" pitchFamily="34" charset="0"/>
-                <a:ea typeface="Aptos" pitchFamily="34" charset="-122"/>
-                <a:cs typeface="Aptos" pitchFamily="34" charset="-120"/>
+              <a:rPr sz="3000">
+                <a:solidFill>
+                  <a:srgbClr val="192448"/>
+                </a:solidFill>
+                <a:latin typeface="Aptos"/>
               </a:rPr>
-              <a:t>A distribuição teve seus maiores valores em agosto</a:t>
+              <a:t>Agosto: a maior distribuição do período</a:t>
             </a:r>
             <a:endParaRPr lang="en-US" sz="3300" dirty="0"/>
           </a:p>
@@ -4747,15 +4886,13 @@
               <a:buNone/>
             </a:pPr>
             <a:r>
-              <a:rPr lang="en-US" sz="1600" dirty="0">
-                <a:solidFill>
-                  <a:srgbClr val="586176"/>
-                </a:solidFill>
-                <a:latin typeface="Aptos" pitchFamily="34" charset="0"/>
-                <a:ea typeface="Aptos" pitchFamily="34" charset="-122"/>
-                <a:cs typeface="Aptos" pitchFamily="34" charset="-120"/>
+              <a:rPr sz="1500">
+                <a:solidFill>
+                  <a:srgbClr val="4C5975"/>
+                </a:solidFill>
+                <a:latin typeface="Aptos"/>
               </a:rPr>
-              <a:t>O Instagram mostrou alcance de 136,3 mil em agosto. No Facebook, o painel mostrou 177,5 mil visualizadores. São métricas distintas e aparecem em gráficos separados.</a:t>
+              <a:t>Agosto concentrou os máximos durante o investimento: 136,3 mil pessoas alcançadas no Instagram (+71,7% ante julho) e 177,5 mil visualizadores no Facebook (+288,4%).</a:t>
             </a:r>
             <a:endParaRPr lang="en-US" sz="1600" dirty="0"/>
           </a:p>
@@ -4785,6 +4922,10 @@
             <a:prstDash val="solid"/>
           </a:ln>
         </p:spPr>
+        <p:txBody>
+          <a:bodyPr/>
+          <a:p/>
+        </p:txBody>
       </p:sp>
       <p:sp>
         <p:nvSpPr>
@@ -4908,6 +5049,10 @@
             <a:prstDash val="solid"/>
           </a:ln>
         </p:spPr>
+        <p:txBody>
+          <a:bodyPr/>
+          <a:p/>
+        </p:txBody>
       </p:sp>
       <p:sp>
         <p:nvSpPr>
@@ -5029,6 +5174,10 @@
             <a:prstDash val="solid"/>
           </a:ln>
         </p:spPr>
+        <p:txBody>
+          <a:bodyPr/>
+          <a:p/>
+        </p:txBody>
       </p:sp>
       <p:sp>
         <p:nvSpPr>
@@ -5098,17 +5247,96 @@
               <a:buNone/>
             </a:pPr>
             <a:r>
-              <a:rPr lang="en-US" sz="750" dirty="0">
-                <a:solidFill>
-                  <a:srgbClr val="697188"/>
-                </a:solidFill>
-                <a:latin typeface="Aptos" pitchFamily="34" charset="0"/>
-                <a:ea typeface="Aptos" pitchFamily="34" charset="-122"/>
-                <a:cs typeface="Aptos" pitchFamily="34" charset="-120"/>
+              <a:rPr sz="800">
+                <a:solidFill>
+                  <a:srgbClr val="67738E"/>
+                </a:solidFill>
+                <a:latin typeface="Aptos"/>
               </a:rPr>
-              <a:t>Apuração: 19/10/2026 | 04 / 07</a:t>
+              <a:t>Apuração: 19/10/2026 | 04 / 08</a:t>
             </a:r>
             <a:endParaRPr lang="en-US" sz="750" dirty="0"/>
+          </a:p>
+        </p:txBody>
+      </p:sp>
+      <p:sp>
+        <p:nvSpPr>
+          <p:cNvPr id="16" name="Rounded Rectangle 15"/>
+          <p:cNvSpPr/>
+          <p:nvPr/>
+        </p:nvSpPr>
+        <p:spPr>
+          <a:xfrm>
+            <a:off x="566928" y="6044184"/>
+            <a:ext cx="11018520" cy="393192"/>
+          </a:xfrm>
+          <a:prstGeom prst="roundRect">
+            <a:avLst>
+              <a:gd name="adj" fmla="val 12000"/>
+            </a:avLst>
+          </a:prstGeom>
+          <a:solidFill>
+            <a:srgbClr val="E8EDF7"/>
+          </a:solidFill>
+          <a:ln>
+            <a:noFill/>
+          </a:ln>
+        </p:spPr>
+        <p:style>
+          <a:lnRef idx="1">
+            <a:schemeClr val="accent1"/>
+          </a:lnRef>
+          <a:fillRef idx="3">
+            <a:schemeClr val="accent1"/>
+          </a:fillRef>
+          <a:effectRef idx="2">
+            <a:schemeClr val="accent1"/>
+          </a:effectRef>
+          <a:fontRef idx="minor">
+            <a:schemeClr val="lt1"/>
+          </a:fontRef>
+        </p:style>
+        <p:txBody>
+          <a:bodyPr rtlCol="0" anchor="ctr"/>
+          <a:lstStyle/>
+          <a:p>
+            <a:pPr algn="ctr"/>
+          </a:p>
+        </p:txBody>
+      </p:sp>
+      <p:sp>
+        <p:nvSpPr>
+          <p:cNvPr id="17" name="TextBox 16"/>
+          <p:cNvSpPr txBox="1"/>
+          <p:nvPr/>
+        </p:nvSpPr>
+        <p:spPr>
+          <a:xfrm>
+            <a:off x="713232" y="6126480"/>
+            <a:ext cx="10716768" cy="246888"/>
+          </a:xfrm>
+          <a:prstGeom prst="rect">
+            <a:avLst/>
+          </a:prstGeom>
+          <a:noFill/>
+        </p:spPr>
+        <p:txBody>
+          <a:bodyPr wrap="square" lIns="27432" rIns="27432" tIns="27432" bIns="27432">
+            <a:spAutoFit/>
+          </a:bodyPr>
+          <a:lstStyle/>
+          <a:p>
+            <a:pPr>
+              <a:defRPr sz="1040" b="0">
+                <a:solidFill>
+                  <a:srgbClr val="243B70"/>
+                </a:solidFill>
+                <a:latin typeface="Aptos"/>
+              </a:defRPr>
+            </a:pPr>
+            <a:r>
+              <a:t>LEITURA  |  Agosto reuniu investimento em CPM, CPE, CPV e CPC; a simultaneidade reforça o valor estratégico da distribuição patrocinada.</a:t>
+            </a:r>
           </a:p>
         </p:txBody>
       </p:sp>
@@ -5212,15 +5440,13 @@
               <a:buNone/>
             </a:pPr>
             <a:r>
-              <a:rPr lang="en-US" sz="3000" b="1" dirty="0">
-                <a:solidFill>
-                  <a:srgbClr val="132044"/>
-                </a:solidFill>
-                <a:latin typeface="Aptos" pitchFamily="34" charset="0"/>
-                <a:ea typeface="Aptos" pitchFamily="34" charset="-122"/>
-                <a:cs typeface="Aptos" pitchFamily="34" charset="-120"/>
+              <a:rPr sz="3000">
+                <a:solidFill>
+                  <a:srgbClr val="192448"/>
+                </a:solidFill>
+                <a:latin typeface="Aptos"/>
               </a:rPr>
-              <a:t>As interações tiveram picos distintos em cada rede</a:t>
+              <a:t>Engajamento: força do conteúdo e da mídia</a:t>
             </a:r>
             <a:endParaRPr lang="en-US" sz="3000" dirty="0"/>
           </a:p>
@@ -5253,15 +5479,13 @@
               <a:buNone/>
             </a:pPr>
             <a:r>
-              <a:rPr lang="en-US" sz="1600" dirty="0">
-                <a:solidFill>
-                  <a:srgbClr val="586176"/>
-                </a:solidFill>
-                <a:latin typeface="Aptos" pitchFamily="34" charset="0"/>
-                <a:ea typeface="Aptos" pitchFamily="34" charset="-122"/>
-                <a:cs typeface="Aptos" pitchFamily="34" charset="-120"/>
+              <a:rPr sz="1500">
+                <a:solidFill>
+                  <a:srgbClr val="4C5975"/>
+                </a:solidFill>
+                <a:latin typeface="Aptos"/>
               </a:rPr>
-              <a:t>O Instagram registrou 7.098 interações em abril, seu maior mês. No Facebook, o pico ocorreu em agosto, com 3.082 interações.</a:t>
+              <a:t>O Instagram teve seu pico em abril (7.098 interações), antes da mídia identificada. Em agosto, as interações cresceram 92,8% no Instagram e 363,5% no Facebook ante julho.</a:t>
             </a:r>
             <a:endParaRPr lang="en-US" sz="1600" dirty="0"/>
           </a:p>
@@ -5291,6 +5515,10 @@
             <a:prstDash val="solid"/>
           </a:ln>
         </p:spPr>
+        <p:txBody>
+          <a:bodyPr/>
+          <a:p/>
+        </p:txBody>
       </p:sp>
       <p:sp>
         <p:nvSpPr>
@@ -5414,6 +5642,10 @@
             <a:prstDash val="solid"/>
           </a:ln>
         </p:spPr>
+        <p:txBody>
+          <a:bodyPr/>
+          <a:p/>
+        </p:txBody>
       </p:sp>
       <p:sp>
         <p:nvSpPr>
@@ -5535,6 +5767,10 @@
             <a:prstDash val="solid"/>
           </a:ln>
         </p:spPr>
+        <p:txBody>
+          <a:bodyPr/>
+          <a:p/>
+        </p:txBody>
       </p:sp>
       <p:sp>
         <p:nvSpPr>
@@ -5604,17 +5840,96 @@
               <a:buNone/>
             </a:pPr>
             <a:r>
-              <a:rPr lang="en-US" sz="750" dirty="0">
-                <a:solidFill>
-                  <a:srgbClr val="697188"/>
-                </a:solidFill>
-                <a:latin typeface="Aptos" pitchFamily="34" charset="0"/>
-                <a:ea typeface="Aptos" pitchFamily="34" charset="-122"/>
-                <a:cs typeface="Aptos" pitchFamily="34" charset="-120"/>
+              <a:rPr sz="800">
+                <a:solidFill>
+                  <a:srgbClr val="67738E"/>
+                </a:solidFill>
+                <a:latin typeface="Aptos"/>
               </a:rPr>
-              <a:t>Apuração: 19/10/2026 | 05 / 07</a:t>
+              <a:t>Apuração: 19/10/2026 | 05 / 08</a:t>
             </a:r>
             <a:endParaRPr lang="en-US" sz="750" dirty="0"/>
+          </a:p>
+        </p:txBody>
+      </p:sp>
+      <p:sp>
+        <p:nvSpPr>
+          <p:cNvPr id="16" name="Rounded Rectangle 15"/>
+          <p:cNvSpPr/>
+          <p:nvPr/>
+        </p:nvSpPr>
+        <p:spPr>
+          <a:xfrm>
+            <a:off x="566928" y="6044184"/>
+            <a:ext cx="11018520" cy="393192"/>
+          </a:xfrm>
+          <a:prstGeom prst="roundRect">
+            <a:avLst>
+              <a:gd name="adj" fmla="val 12000"/>
+            </a:avLst>
+          </a:prstGeom>
+          <a:solidFill>
+            <a:srgbClr val="E8EDF7"/>
+          </a:solidFill>
+          <a:ln>
+            <a:noFill/>
+          </a:ln>
+        </p:spPr>
+        <p:style>
+          <a:lnRef idx="1">
+            <a:schemeClr val="accent1"/>
+          </a:lnRef>
+          <a:fillRef idx="3">
+            <a:schemeClr val="accent1"/>
+          </a:fillRef>
+          <a:effectRef idx="2">
+            <a:schemeClr val="accent1"/>
+          </a:effectRef>
+          <a:fontRef idx="minor">
+            <a:schemeClr val="lt1"/>
+          </a:fontRef>
+        </p:style>
+        <p:txBody>
+          <a:bodyPr rtlCol="0" anchor="ctr"/>
+          <a:lstStyle/>
+          <a:p>
+            <a:pPr algn="ctr"/>
+          </a:p>
+        </p:txBody>
+      </p:sp>
+      <p:sp>
+        <p:nvSpPr>
+          <p:cNvPr id="17" name="TextBox 16"/>
+          <p:cNvSpPr txBox="1"/>
+          <p:nvPr/>
+        </p:nvSpPr>
+        <p:spPr>
+          <a:xfrm>
+            <a:off x="713232" y="6126480"/>
+            <a:ext cx="10716768" cy="246888"/>
+          </a:xfrm>
+          <a:prstGeom prst="rect">
+            <a:avLst/>
+          </a:prstGeom>
+          <a:noFill/>
+        </p:spPr>
+        <p:txBody>
+          <a:bodyPr wrap="square" lIns="27432" rIns="27432" tIns="27432" bIns="27432">
+            <a:spAutoFit/>
+          </a:bodyPr>
+          <a:lstStyle/>
+          <a:p>
+            <a:pPr>
+              <a:defRPr sz="1040" b="0">
+                <a:solidFill>
+                  <a:srgbClr val="243B70"/>
+                </a:solidFill>
+                <a:latin typeface="Aptos"/>
+              </a:defRPr>
+            </a:pPr>
+            <a:r>
+              <a:t>LEITURA  |  Conteúdo mobilizou a audiência em março/abril; em agosto, conteúdo e mídia caminharam juntos nos avanços das duas redes.</a:t>
+            </a:r>
           </a:p>
         </p:txBody>
       </p:sp>
@@ -5718,15 +6033,13 @@
               <a:buNone/>
             </a:pPr>
             <a:r>
-              <a:rPr lang="en-US" sz="2900" b="1" dirty="0">
-                <a:solidFill>
-                  <a:srgbClr val="132044"/>
-                </a:solidFill>
-                <a:latin typeface="Aptos" pitchFamily="34" charset="0"/>
-                <a:ea typeface="Aptos" pitchFamily="34" charset="-122"/>
-                <a:cs typeface="Aptos" pitchFamily="34" charset="-120"/>
+              <a:rPr sz="3100">
+                <a:solidFill>
+                  <a:srgbClr val="192448"/>
+                </a:solidFill>
+                <a:latin typeface="Aptos"/>
               </a:rPr>
-              <a:t>Serviços e espaços públicos aparecem nos posts de destaque</a:t>
+              <a:t>Conteúdos do DAE que mobilizaram o público</a:t>
             </a:r>
             <a:endParaRPr lang="en-US" sz="2900" dirty="0"/>
           </a:p>
@@ -5756,10 +6069,16 @@
             <a:prstDash val="solid"/>
           </a:ln>
         </p:spPr>
+        <p:txBody>
+          <a:bodyPr/>
+          <a:p/>
+        </p:txBody>
       </p:sp>
       <p:pic>
         <p:nvPicPr>
-          <p:cNvPr id="5" name="Image 0" descr="/Users/bruno/.codex/.chatgpt-projects/g-p-6ac7dbe994808191a54985dc5d276d5e/outputs/post-ig-caminhada-corte.png">    </p:cNvPr>
+          <p:cNvPr id="5" name="Image 0" descr="/Users/bruno/.codex/.chatgpt-projects/g-p-6ac7dbe994808191a54985dc5d276d5e/outputs/post-ig-caminhada-corte.png">
+            <a:hlinkClick r:id="rId9"/>
+          </p:cNvPr>
           <p:cNvPicPr>
             <a:picLocks noChangeAspect="1"/>
           </p:cNvPicPr>
@@ -5969,10 +6288,16 @@
             <a:prstDash val="solid"/>
           </a:ln>
         </p:spPr>
+        <p:txBody>
+          <a:bodyPr/>
+          <a:p/>
+        </p:txBody>
       </p:sp>
       <p:pic>
         <p:nvPicPr>
-          <p:cNvPr id="11" name="Image 1" descr="/Users/bruno/.codex/.chatgpt-projects/g-p-6ac7dbe994808191a54985dc5d276d5e/outputs/post-ig-lago-corte.png">    </p:cNvPr>
+          <p:cNvPr id="11" name="Image 1" descr="/Users/bruno/.codex/.chatgpt-projects/g-p-6ac7dbe994808191a54985dc5d276d5e/outputs/post-ig-lago-corte.png">
+            <a:hlinkClick r:id="rId10"/>
+          </p:cNvPr>
           <p:cNvPicPr>
             <a:picLocks noChangeAspect="1"/>
           </p:cNvPicPr>
@@ -6182,10 +6507,16 @@
             <a:prstDash val="solid"/>
           </a:ln>
         </p:spPr>
+        <p:txBody>
+          <a:bodyPr/>
+          <a:p/>
+        </p:txBody>
       </p:sp>
       <p:pic>
         <p:nvPicPr>
-          <p:cNvPr id="17" name="Image 2" descr="/Users/bruno/.codex/.chatgpt-projects/g-p-6ac7dbe994808191a54985dc5d276d5e/outputs/post-ig-hidratacao-corte.png">    </p:cNvPr>
+          <p:cNvPr id="17" name="Image 2" descr="/Users/bruno/.codex/.chatgpt-projects/g-p-6ac7dbe994808191a54985dc5d276d5e/outputs/post-ig-hidratacao-corte.png">
+            <a:hlinkClick r:id="rId11"/>
+          </p:cNvPr>
           <p:cNvPicPr>
             <a:picLocks noChangeAspect="1"/>
           </p:cNvPicPr>
@@ -6395,10 +6726,16 @@
             <a:prstDash val="solid"/>
           </a:ln>
         </p:spPr>
+        <p:txBody>
+          <a:bodyPr/>
+          <a:p/>
+        </p:txBody>
       </p:sp>
       <p:pic>
         <p:nvPicPr>
-          <p:cNvPr id="23" name="Image 3" descr="/Users/bruno/.codex/.chatgpt-projects/g-p-6ac7dbe994808191a54985dc5d276d5e/outputs/post-fb-mulheres-corte.png">    </p:cNvPr>
+          <p:cNvPr id="23" name="Image 3" descr="/Users/bruno/.codex/.chatgpt-projects/g-p-6ac7dbe994808191a54985dc5d276d5e/outputs/post-fb-mulheres-corte.png">
+            <a:hlinkClick r:id="rId12"/>
+          </p:cNvPr>
           <p:cNvPicPr>
             <a:picLocks noChangeAspect="1"/>
           </p:cNvPicPr>
@@ -6608,10 +6945,16 @@
             <a:prstDash val="solid"/>
           </a:ln>
         </p:spPr>
+        <p:txBody>
+          <a:bodyPr/>
+          <a:p/>
+        </p:txBody>
       </p:sp>
       <p:pic>
         <p:nvPicPr>
-          <p:cNvPr id="29" name="Image 4" descr="/Users/bruno/.codex/.chatgpt-projects/g-p-6ac7dbe994808191a54985dc5d276d5e/outputs/post-fb-conta-corte.png">    </p:cNvPr>
+          <p:cNvPr id="29" name="Image 4" descr="/Users/bruno/.codex/.chatgpt-projects/g-p-6ac7dbe994808191a54985dc5d276d5e/outputs/post-fb-conta-corte.png">
+            <a:hlinkClick r:id="rId13"/>
+          </p:cNvPr>
           <p:cNvPicPr>
             <a:picLocks noChangeAspect="1"/>
           </p:cNvPicPr>
@@ -6821,10 +7164,16 @@
             <a:prstDash val="solid"/>
           </a:ln>
         </p:spPr>
+        <p:txBody>
+          <a:bodyPr/>
+          <a:p/>
+        </p:txBody>
       </p:sp>
       <p:pic>
         <p:nvPicPr>
-          <p:cNvPr id="35" name="Image 5" descr="/Users/bruno/.codex/.chatgpt-projects/g-p-6ac7dbe994808191a54985dc5d276d5e/outputs/post-fb-fatura-corte.png">    </p:cNvPr>
+          <p:cNvPr id="35" name="Image 5" descr="/Users/bruno/.codex/.chatgpt-projects/g-p-6ac7dbe994808191a54985dc5d276d5e/outputs/post-fb-fatura-corte.png">
+            <a:hlinkClick r:id="rId14"/>
+          </p:cNvPr>
           <p:cNvPicPr>
             <a:picLocks noChangeAspect="1"/>
           </p:cNvPicPr>
@@ -7032,6 +7381,10 @@
             <a:prstDash val="solid"/>
           </a:ln>
         </p:spPr>
+        <p:txBody>
+          <a:bodyPr/>
+          <a:p/>
+        </p:txBody>
       </p:sp>
       <p:sp>
         <p:nvSpPr>
@@ -7101,17 +7454,231 @@
               <a:buNone/>
             </a:pPr>
             <a:r>
-              <a:rPr lang="en-US" sz="750" dirty="0">
-                <a:solidFill>
-                  <a:srgbClr val="697188"/>
-                </a:solidFill>
-                <a:latin typeface="Aptos" pitchFamily="34" charset="0"/>
-                <a:ea typeface="Aptos" pitchFamily="34" charset="-122"/>
-                <a:cs typeface="Aptos" pitchFamily="34" charset="-120"/>
+              <a:rPr sz="800">
+                <a:solidFill>
+                  <a:srgbClr val="67738E"/>
+                </a:solidFill>
+                <a:latin typeface="Aptos"/>
               </a:rPr>
-              <a:t>Apuração: 19/10/2026 | 06 / 07</a:t>
+              <a:t>Apuração: 19/10/2026 | 06 / 08</a:t>
             </a:r>
             <a:endParaRPr lang="en-US" sz="750" dirty="0"/>
+          </a:p>
+        </p:txBody>
+      </p:sp>
+      <p:sp>
+        <p:nvSpPr>
+          <p:cNvPr id="43" name="Link para publicacao 5"/>
+          <p:cNvSpPr txBox="1"/>
+          <p:nvPr/>
+        </p:nvSpPr>
+        <p:spPr>
+          <a:xfrm>
+            <a:off x="2011680" y="3584448"/>
+            <a:ext cx="1911095" cy="182880"/>
+          </a:xfrm>
+          <a:prstGeom prst="rect">
+            <a:avLst/>
+          </a:prstGeom>
+          <a:noFill/>
+        </p:spPr>
+        <p:txBody>
+          <a:bodyPr wrap="none" lIns="0" tIns="0" rIns="0" bIns="0">
+            <a:spAutoFit/>
+          </a:bodyPr>
+          <a:lstStyle/>
+          <a:p>
+            <a:pPr algn="l"/>
+            <a:r>
+              <a:rPr sz="919" u="sng">
+                <a:solidFill>
+                  <a:srgbClr val="445FAA"/>
+                </a:solidFill>
+                <a:latin typeface="Aptos"/>
+                <a:hlinkClick r:id="rId9"/>
+              </a:rPr>
+              <a:t>Ver publicação ↗</a:t>
+            </a:r>
+          </a:p>
+        </p:txBody>
+      </p:sp>
+      <p:sp>
+        <p:nvSpPr>
+          <p:cNvPr id="44" name="Link para publicacao 11"/>
+          <p:cNvSpPr txBox="1"/>
+          <p:nvPr/>
+        </p:nvSpPr>
+        <p:spPr>
+          <a:xfrm>
+            <a:off x="5797296" y="3584448"/>
+            <a:ext cx="1911095" cy="182880"/>
+          </a:xfrm>
+          <a:prstGeom prst="rect">
+            <a:avLst/>
+          </a:prstGeom>
+          <a:noFill/>
+        </p:spPr>
+        <p:txBody>
+          <a:bodyPr wrap="none" lIns="0" tIns="0" rIns="0" bIns="0">
+            <a:spAutoFit/>
+          </a:bodyPr>
+          <a:lstStyle/>
+          <a:p>
+            <a:pPr algn="l"/>
+            <a:r>
+              <a:rPr sz="919" u="sng">
+                <a:solidFill>
+                  <a:srgbClr val="445FAA"/>
+                </a:solidFill>
+                <a:latin typeface="Aptos"/>
+                <a:hlinkClick r:id="rId10"/>
+              </a:rPr>
+              <a:t>Ver publicação ↗</a:t>
+            </a:r>
+          </a:p>
+        </p:txBody>
+      </p:sp>
+      <p:sp>
+        <p:nvSpPr>
+          <p:cNvPr id="45" name="Link para publicacao 17"/>
+          <p:cNvSpPr txBox="1"/>
+          <p:nvPr/>
+        </p:nvSpPr>
+        <p:spPr>
+          <a:xfrm>
+            <a:off x="9582912" y="3584448"/>
+            <a:ext cx="1911095" cy="182880"/>
+          </a:xfrm>
+          <a:prstGeom prst="rect">
+            <a:avLst/>
+          </a:prstGeom>
+          <a:noFill/>
+        </p:spPr>
+        <p:txBody>
+          <a:bodyPr wrap="none" lIns="0" tIns="0" rIns="0" bIns="0">
+            <a:spAutoFit/>
+          </a:bodyPr>
+          <a:lstStyle/>
+          <a:p>
+            <a:pPr algn="l"/>
+            <a:r>
+              <a:rPr sz="919" u="sng">
+                <a:solidFill>
+                  <a:srgbClr val="445FAA"/>
+                </a:solidFill>
+                <a:latin typeface="Aptos"/>
+                <a:hlinkClick r:id="rId11"/>
+              </a:rPr>
+              <a:t>Ver publicação ↗</a:t>
+            </a:r>
+          </a:p>
+        </p:txBody>
+      </p:sp>
+      <p:sp>
+        <p:nvSpPr>
+          <p:cNvPr id="46" name="Link para publicacao 23"/>
+          <p:cNvSpPr txBox="1"/>
+          <p:nvPr/>
+        </p:nvSpPr>
+        <p:spPr>
+          <a:xfrm>
+            <a:off x="2011680" y="5641848"/>
+            <a:ext cx="1911095" cy="182880"/>
+          </a:xfrm>
+          <a:prstGeom prst="rect">
+            <a:avLst/>
+          </a:prstGeom>
+          <a:noFill/>
+        </p:spPr>
+        <p:txBody>
+          <a:bodyPr wrap="none" lIns="0" tIns="0" rIns="0" bIns="0">
+            <a:spAutoFit/>
+          </a:bodyPr>
+          <a:lstStyle/>
+          <a:p>
+            <a:pPr algn="l"/>
+            <a:r>
+              <a:rPr sz="919" u="sng">
+                <a:solidFill>
+                  <a:srgbClr val="445FAA"/>
+                </a:solidFill>
+                <a:latin typeface="Aptos"/>
+                <a:hlinkClick r:id="rId12"/>
+              </a:rPr>
+              <a:t>Ver publicação ↗</a:t>
+            </a:r>
+          </a:p>
+        </p:txBody>
+      </p:sp>
+      <p:sp>
+        <p:nvSpPr>
+          <p:cNvPr id="47" name="Link para publicacao 29"/>
+          <p:cNvSpPr txBox="1"/>
+          <p:nvPr/>
+        </p:nvSpPr>
+        <p:spPr>
+          <a:xfrm>
+            <a:off x="5797296" y="5641848"/>
+            <a:ext cx="1911095" cy="182880"/>
+          </a:xfrm>
+          <a:prstGeom prst="rect">
+            <a:avLst/>
+          </a:prstGeom>
+          <a:noFill/>
+        </p:spPr>
+        <p:txBody>
+          <a:bodyPr wrap="none" lIns="0" tIns="0" rIns="0" bIns="0">
+            <a:spAutoFit/>
+          </a:bodyPr>
+          <a:lstStyle/>
+          <a:p>
+            <a:pPr algn="l"/>
+            <a:r>
+              <a:rPr sz="919" u="sng">
+                <a:solidFill>
+                  <a:srgbClr val="445FAA"/>
+                </a:solidFill>
+                <a:latin typeface="Aptos"/>
+                <a:hlinkClick r:id="rId13"/>
+              </a:rPr>
+              <a:t>Ver publicação ↗</a:t>
+            </a:r>
+          </a:p>
+        </p:txBody>
+      </p:sp>
+      <p:sp>
+        <p:nvSpPr>
+          <p:cNvPr id="48" name="Link para publicacao 35"/>
+          <p:cNvSpPr txBox="1"/>
+          <p:nvPr/>
+        </p:nvSpPr>
+        <p:spPr>
+          <a:xfrm>
+            <a:off x="9582912" y="5641848"/>
+            <a:ext cx="1911095" cy="182880"/>
+          </a:xfrm>
+          <a:prstGeom prst="rect">
+            <a:avLst/>
+          </a:prstGeom>
+          <a:noFill/>
+        </p:spPr>
+        <p:txBody>
+          <a:bodyPr wrap="none" lIns="0" tIns="0" rIns="0" bIns="0">
+            <a:spAutoFit/>
+          </a:bodyPr>
+          <a:lstStyle/>
+          <a:p>
+            <a:pPr algn="l"/>
+            <a:r>
+              <a:rPr sz="919" u="sng">
+                <a:solidFill>
+                  <a:srgbClr val="445FAA"/>
+                </a:solidFill>
+                <a:latin typeface="Aptos"/>
+                <a:hlinkClick r:id="rId14"/>
+              </a:rPr>
+              <a:t>Ver publicação ↗</a:t>
+            </a:r>
           </a:p>
         </p:txBody>
       </p:sp>
@@ -7174,15 +7741,13 @@
               <a:buNone/>
             </a:pPr>
             <a:r>
-              <a:rPr lang="en-US" sz="1000" b="1" spc="200" kern="0" dirty="0">
-                <a:solidFill>
-                  <a:srgbClr val="B8B8E7"/>
-                </a:solidFill>
-                <a:latin typeface="Aptos" pitchFamily="34" charset="0"/>
-                <a:ea typeface="Aptos" pitchFamily="34" charset="-122"/>
-                <a:cs typeface="Aptos" pitchFamily="34" charset="-120"/>
+              <a:rPr sz="1100">
+                <a:solidFill>
+                  <a:srgbClr val="AFBDF1"/>
+                </a:solidFill>
+                <a:latin typeface="Aptos"/>
               </a:rPr>
-              <a:t>06 | FECHAMENTO</a:t>
+              <a:t>07 | CONCLUSÕES E PRÓXIMOS PASSOS</a:t>
             </a:r>
             <a:endParaRPr lang="en-US" sz="1000" dirty="0"/>
           </a:p>
@@ -7215,15 +7780,13 @@
               <a:buNone/>
             </a:pPr>
             <a:r>
-              <a:rPr lang="en-US" sz="3400" b="1" dirty="0">
+              <a:rPr sz="2900">
                 <a:solidFill>
                   <a:srgbClr val="FFFFFF"/>
                 </a:solidFill>
-                <a:latin typeface="Aptos" pitchFamily="34" charset="0"/>
-                <a:ea typeface="Aptos" pitchFamily="34" charset="-122"/>
-                <a:cs typeface="Aptos" pitchFamily="34" charset="-120"/>
+                <a:latin typeface="Aptos"/>
               </a:rPr>
-              <a:t>Os dados orientam os próximos testes da comunicação</a:t>
+              <a:t>Conteúdo relevante + mídia ampliam resultados</a:t>
             </a:r>
             <a:endParaRPr lang="en-US" sz="3400" dirty="0"/>
           </a:p>
@@ -7256,15 +7819,13 @@
               <a:buNone/>
             </a:pPr>
             <a:r>
-              <a:rPr lang="en-US" sz="1600" dirty="0">
-                <a:solidFill>
-                  <a:srgbClr val="E2E5F4"/>
-                </a:solidFill>
-                <a:latin typeface="Aptos" pitchFamily="34" charset="0"/>
-                <a:ea typeface="Aptos" pitchFamily="34" charset="-122"/>
-                <a:cs typeface="Aptos" pitchFamily="34" charset="-120"/>
+              <a:rPr sz="1500">
+                <a:solidFill>
+                  <a:srgbClr val="D7E1F2"/>
+                </a:solidFill>
+                <a:latin typeface="Aptos"/>
               </a:rPr>
-              <a:t>A equipe pode transformar os padrões observados em hipóteses de conteúdo, com acompanhamento mensal dos indicadores.</a:t>
+              <a:t>Os indicadores demonstram o valor de combinar informação útil à população com distribuição planejada. Agosto é o melhor exemplo dessa associação.</a:t>
             </a:r>
             <a:endParaRPr lang="en-US" sz="1600" dirty="0"/>
           </a:p>
@@ -7292,6 +7853,10 @@
             <a:prstDash val="solid"/>
           </a:ln>
         </p:spPr>
+        <p:txBody>
+          <a:bodyPr/>
+          <a:p/>
+        </p:txBody>
       </p:sp>
       <p:sp>
         <p:nvSpPr>
@@ -7361,15 +7926,13 @@
               <a:buNone/>
             </a:pPr>
             <a:r>
-              <a:rPr lang="en-US" sz="2000" b="1" dirty="0">
+              <a:rPr sz="2000">
                 <a:solidFill>
                   <a:srgbClr val="FFFFFF"/>
                 </a:solidFill>
-                <a:latin typeface="Aptos" pitchFamily="34" charset="0"/>
-                <a:ea typeface="Aptos" pitchFamily="34" charset="-122"/>
-                <a:cs typeface="Aptos" pitchFamily="34" charset="-120"/>
+                <a:latin typeface="Aptos"/>
               </a:rPr>
-              <a:t>Repetir formatos com resposta</a:t>
+              <a:t>Valorizar os temas de serviço</a:t>
             </a:r>
             <a:endParaRPr lang="en-US" sz="2000" dirty="0"/>
           </a:p>
@@ -7402,15 +7965,13 @@
               <a:buNone/>
             </a:pPr>
             <a:r>
-              <a:rPr lang="en-US" sz="1500" dirty="0">
-                <a:solidFill>
-                  <a:srgbClr val="DCE0F0"/>
-                </a:solidFill>
-                <a:latin typeface="Aptos" pitchFamily="34" charset="0"/>
-                <a:ea typeface="Aptos" pitchFamily="34" charset="-122"/>
-                <a:cs typeface="Aptos" pitchFamily="34" charset="-120"/>
+              <a:rPr sz="1500">
+                <a:solidFill>
+                  <a:srgbClr val="FFFFFF"/>
+                </a:solidFill>
+                <a:latin typeface="Aptos"/>
               </a:rPr>
-              <a:t>Testar novos vídeos explicativos e peças de serviço, tomando os posts de destaque como referência editorial.</a:t>
+              <a:t>Repetir formatos do DAE que esclareçam dúvidas e despertem interesse, analisando respostas por conteúdo.</a:t>
             </a:r>
             <a:endParaRPr lang="en-US" sz="1500" dirty="0"/>
           </a:p>
@@ -7438,6 +7999,10 @@
             <a:prstDash val="solid"/>
           </a:ln>
         </p:spPr>
+        <p:txBody>
+          <a:bodyPr/>
+          <a:p/>
+        </p:txBody>
       </p:sp>
       <p:sp>
         <p:nvSpPr>
@@ -7507,15 +8072,13 @@
               <a:buNone/>
             </a:pPr>
             <a:r>
-              <a:rPr lang="en-US" sz="2000" b="1" dirty="0">
+              <a:rPr sz="2000">
                 <a:solidFill>
                   <a:srgbClr val="FFFFFF"/>
                 </a:solidFill>
-                <a:latin typeface="Aptos" pitchFamily="34" charset="0"/>
-                <a:ea typeface="Aptos" pitchFamily="34" charset="-122"/>
-                <a:cs typeface="Aptos" pitchFamily="34" charset="-120"/>
+                <a:latin typeface="Aptos"/>
               </a:rPr>
-              <a:t>Responder dúvidas recorrentes</a:t>
+              <a:t>Planejar mídia contínua</a:t>
             </a:r>
             <a:endParaRPr lang="en-US" sz="2000" dirty="0"/>
           </a:p>
@@ -7548,15 +8111,13 @@
               <a:buNone/>
             </a:pPr>
             <a:r>
-              <a:rPr lang="en-US" sz="1500" dirty="0">
-                <a:solidFill>
-                  <a:srgbClr val="DCE0F0"/>
-                </a:solidFill>
-                <a:latin typeface="Aptos" pitchFamily="34" charset="0"/>
-                <a:ea typeface="Aptos" pitchFamily="34" charset="-122"/>
-                <a:cs typeface="Aptos" pitchFamily="34" charset="-120"/>
+              <a:rPr sz="1500">
+                <a:solidFill>
+                  <a:srgbClr val="FFFFFF"/>
+                </a:solidFill>
+                <a:latin typeface="Aptos"/>
               </a:rPr>
-              <a:t>Usar perguntas dos comentários para tornar informações práticas mais claras nas próximas publicações.</a:t>
+              <a:t>Apoiar temas prioritários com campanhas e acompanhar alcance e interações antes, durante e depois.</a:t>
             </a:r>
             <a:endParaRPr lang="en-US" sz="1500" dirty="0"/>
           </a:p>
@@ -7584,6 +8145,10 @@
             <a:prstDash val="solid"/>
           </a:ln>
         </p:spPr>
+        <p:txBody>
+          <a:bodyPr/>
+          <a:p/>
+        </p:txBody>
       </p:sp>
       <p:sp>
         <p:nvSpPr>
@@ -7653,15 +8218,13 @@
               <a:buNone/>
             </a:pPr>
             <a:r>
-              <a:rPr lang="en-US" sz="2000" b="1" dirty="0">
+              <a:rPr sz="2000">
                 <a:solidFill>
                   <a:srgbClr val="FFFFFF"/>
                 </a:solidFill>
-                <a:latin typeface="Aptos" pitchFamily="34" charset="0"/>
-                <a:ea typeface="Aptos" pitchFamily="34" charset="-122"/>
-                <a:cs typeface="Aptos" pitchFamily="34" charset="-120"/>
+                <a:latin typeface="Aptos"/>
               </a:rPr>
-              <a:t>Revisar meses de menor resposta</a:t>
+              <a:t>Medir para aperfeiçoar</a:t>
             </a:r>
             <a:endParaRPr lang="en-US" sz="2000" dirty="0"/>
           </a:p>
@@ -7694,15 +8257,13 @@
               <a:buNone/>
             </a:pPr>
             <a:r>
-              <a:rPr lang="en-US" sz="1500" dirty="0">
-                <a:solidFill>
-                  <a:srgbClr val="DCE0F0"/>
-                </a:solidFill>
-                <a:latin typeface="Aptos" pitchFamily="34" charset="0"/>
-                <a:ea typeface="Aptos" pitchFamily="34" charset="-122"/>
-                <a:cs typeface="Aptos" pitchFamily="34" charset="-120"/>
+              <a:rPr sz="1500">
+                <a:solidFill>
+                  <a:srgbClr val="FFFFFF"/>
+                </a:solidFill>
+                <a:latin typeface="Aptos"/>
               </a:rPr>
-              <a:t>Conferir temas, formatos, frequência e distribuição antes de associar um pico a uma única peça.</a:t>
+              <a:t>Monitorar seguidores líquidos, alcance, visualizadores e engajamento, distinguindo efeitos orgânicos e de mídia.</a:t>
             </a:r>
             <a:endParaRPr lang="en-US" sz="1500" dirty="0"/>
           </a:p>
@@ -7716,8 +8277,8 @@
         </p:nvSpPr>
         <p:spPr>
           <a:xfrm>
-            <a:off x="548640" y="5815584"/>
-            <a:ext cx="11064240" cy="411480"/>
+            <a:off x="548640" y="5779008"/>
+            <a:ext cx="11064240" cy="493776"/>
           </a:xfrm>
           <a:prstGeom prst="rect">
             <a:avLst/>
@@ -7731,21 +8292,15 @@
           </a:bodyPr>
           <a:lstStyle/>
           <a:p>
-            <a:pPr indent="0" marL="0">
-              <a:buNone/>
-            </a:pPr>
-            <a:r>
-              <a:rPr lang="en-US" sz="1100" dirty="0">
-                <a:solidFill>
-                  <a:srgbClr val="DCE0F0"/>
-                </a:solidFill>
-                <a:latin typeface="Aptos" pitchFamily="34" charset="0"/>
-                <a:ea typeface="Aptos" pitchFamily="34" charset="-122"/>
-                <a:cs typeface="Aptos" pitchFamily="34" charset="-120"/>
+            <a:r>
+              <a:rPr sz="1300">
+                <a:solidFill>
+                  <a:srgbClr val="D2DCF0"/>
+                </a:solidFill>
+                <a:latin typeface="Aptos"/>
               </a:rPr>
-              <a:t>Bases mensais de seguidores reconstruídas a partir do total atual e das variações do Business Suite. O Facebook apresenta visualizadores no painel consultado.</a:t>
-            </a:r>
-            <a:endParaRPr lang="en-US" sz="1100" dirty="0"/>
+              <a:t>Escopo: somente Instagram e Facebook institucionais do DAE Jundiaí. A associação entre investimento e picos não demonstra causalidade exclusiva.</a:t>
+            </a:r>
           </a:p>
         </p:txBody>
       </p:sp>
@@ -7771,6 +8326,10 @@
             <a:prstDash val="solid"/>
           </a:ln>
         </p:spPr>
+        <p:txBody>
+          <a:bodyPr/>
+          <a:p/>
+        </p:txBody>
       </p:sp>
       <p:sp>
         <p:nvSpPr>
@@ -7840,17 +8399,963 @@
               <a:buNone/>
             </a:pPr>
             <a:r>
-              <a:rPr lang="en-US" sz="750" dirty="0">
-                <a:solidFill>
-                  <a:srgbClr val="C7CBE0"/>
-                </a:solidFill>
-                <a:latin typeface="Aptos" pitchFamily="34" charset="0"/>
-                <a:ea typeface="Aptos" pitchFamily="34" charset="-122"/>
-                <a:cs typeface="Aptos" pitchFamily="34" charset="-120"/>
+              <a:rPr sz="800">
+                <a:solidFill>
+                  <a:srgbClr val="67738E"/>
+                </a:solidFill>
+                <a:latin typeface="Aptos"/>
               </a:rPr>
-              <a:t>Apuração: 19/10/2026 | 07 / 07</a:t>
+              <a:t>Apuração: 19/10/2026 | 08 / 08</a:t>
             </a:r>
             <a:endParaRPr lang="en-US" sz="750" dirty="0"/>
+          </a:p>
+        </p:txBody>
+      </p:sp>
+    </p:spTree>
+  </p:cSld>
+  <p:clrMapOvr>
+    <a:masterClrMapping/>
+  </p:clrMapOvr>
+</p:sld>
+</file>
+
+<file path=ppt/slides/slide8.xml><?xml version="1.0" encoding="utf-8"?>
+<p:sld xmlns:a="http://schemas.openxmlformats.org/drawingml/2006/main" xmlns:p="http://schemas.openxmlformats.org/presentationml/2006/main" xmlns:r="http://schemas.openxmlformats.org/officeDocument/2006/relationships">
+  <p:cSld>
+    <p:spTree>
+      <p:nvGrpSpPr>
+        <p:cNvPr id="1" name=""/>
+        <p:cNvGrpSpPr/>
+        <p:nvPr/>
+      </p:nvGrpSpPr>
+      <p:grpSpPr/>
+      <p:sp>
+        <p:nvSpPr>
+          <p:cNvPr id="2" name="Rectangle 1"/>
+          <p:cNvSpPr/>
+          <p:nvPr/>
+        </p:nvSpPr>
+        <p:spPr>
+          <a:xfrm>
+            <a:off x="0" y="0"/>
+            <a:ext cx="12191695" cy="6858000"/>
+          </a:xfrm>
+          <a:prstGeom prst="rect">
+            <a:avLst/>
+          </a:prstGeom>
+          <a:solidFill>
+            <a:srgbClr val="F5F7FB"/>
+          </a:solidFill>
+          <a:ln>
+            <a:noFill/>
+          </a:ln>
+        </p:spPr>
+        <p:style>
+          <a:lnRef idx="1">
+            <a:schemeClr val="accent1"/>
+          </a:lnRef>
+          <a:fillRef idx="3">
+            <a:schemeClr val="accent1"/>
+          </a:fillRef>
+          <a:effectRef idx="2">
+            <a:schemeClr val="accent1"/>
+          </a:effectRef>
+          <a:fontRef idx="minor">
+            <a:schemeClr val="lt1"/>
+          </a:fontRef>
+        </p:style>
+        <p:txBody>
+          <a:bodyPr rtlCol="0" anchor="ctr"/>
+          <a:lstStyle/>
+          <a:p>
+            <a:pPr algn="ctr"/>
+          </a:p>
+        </p:txBody>
+      </p:sp>
+      <p:sp>
+        <p:nvSpPr>
+          <p:cNvPr id="3" name="TextBox 2"/>
+          <p:cNvSpPr txBox="1"/>
+          <p:nvPr/>
+        </p:nvSpPr>
+        <p:spPr>
+          <a:xfrm>
+            <a:off x="548640" y="320040"/>
+            <a:ext cx="10972800" cy="274320"/>
+          </a:xfrm>
+          <a:prstGeom prst="rect">
+            <a:avLst/>
+          </a:prstGeom>
+          <a:noFill/>
+        </p:spPr>
+        <p:txBody>
+          <a:bodyPr wrap="square" lIns="27432" rIns="27432" tIns="27432" bIns="27432">
+            <a:spAutoFit/>
+          </a:bodyPr>
+          <a:lstStyle/>
+          <a:p>
+            <a:pPr>
+              <a:defRPr sz="1100" b="1">
+                <a:solidFill>
+                  <a:srgbClr val="6175A2"/>
+                </a:solidFill>
+                <a:latin typeface="Aptos"/>
+              </a:defRPr>
+            </a:pPr>
+            <a:r>
+              <a:t>06  |  INVESTIMENTO E DESEMPENHO</a:t>
+            </a:r>
+          </a:p>
+        </p:txBody>
+      </p:sp>
+      <p:sp>
+        <p:nvSpPr>
+          <p:cNvPr id="4" name="TextBox 3"/>
+          <p:cNvSpPr txBox="1"/>
+          <p:nvPr/>
+        </p:nvSpPr>
+        <p:spPr>
+          <a:xfrm>
+            <a:off x="548640" y="804672"/>
+            <a:ext cx="10972800" cy="914400"/>
+          </a:xfrm>
+          <a:prstGeom prst="rect">
+            <a:avLst/>
+          </a:prstGeom>
+          <a:noFill/>
+        </p:spPr>
+        <p:txBody>
+          <a:bodyPr wrap="square" lIns="27432" rIns="27432" tIns="27432" bIns="27432">
+            <a:spAutoFit/>
+          </a:bodyPr>
+          <a:lstStyle/>
+          <a:p>
+            <a:pPr>
+              <a:defRPr sz="3200" b="1">
+                <a:solidFill>
+                  <a:srgbClr val="192448"/>
+                </a:solidFill>
+                <a:latin typeface="Aptos"/>
+              </a:defRPr>
+            </a:pPr>
+            <a:r>
+              <a:t>Agosto oferece a evidência mais forte</a:t>
+            </a:r>
+          </a:p>
+        </p:txBody>
+      </p:sp>
+      <p:sp>
+        <p:nvSpPr>
+          <p:cNvPr id="5" name="TextBox 4"/>
+          <p:cNvSpPr txBox="1"/>
+          <p:nvPr/>
+        </p:nvSpPr>
+        <p:spPr>
+          <a:xfrm>
+            <a:off x="548640" y="1481328"/>
+            <a:ext cx="10972800" cy="420624"/>
+          </a:xfrm>
+          <a:prstGeom prst="rect">
+            <a:avLst/>
+          </a:prstGeom>
+          <a:noFill/>
+        </p:spPr>
+        <p:txBody>
+          <a:bodyPr wrap="square" lIns="27432" rIns="27432" tIns="27432" bIns="27432">
+            <a:spAutoFit/>
+          </a:bodyPr>
+          <a:lstStyle/>
+          <a:p>
+            <a:pPr>
+              <a:defRPr sz="1500" b="0">
+                <a:solidFill>
+                  <a:srgbClr val="4C5975"/>
+                </a:solidFill>
+                <a:latin typeface="Aptos"/>
+              </a:defRPr>
+            </a:pPr>
+            <a:r>
+              <a:t>As campanhas do DAE veicularam de 7 a 28 de agosto; quatro indicadores cresceram simultaneamente em relação a julho.</a:t>
+            </a:r>
+          </a:p>
+        </p:txBody>
+      </p:sp>
+      <p:sp>
+        <p:nvSpPr>
+          <p:cNvPr id="6" name="Rounded Rectangle 5"/>
+          <p:cNvSpPr/>
+          <p:nvPr/>
+        </p:nvSpPr>
+        <p:spPr>
+          <a:xfrm>
+            <a:off x="585216" y="2148840"/>
+            <a:ext cx="5440680" cy="1243584"/>
+          </a:xfrm>
+          <a:prstGeom prst="roundRect">
+            <a:avLst>
+              <a:gd name="adj" fmla="val 12000"/>
+            </a:avLst>
+          </a:prstGeom>
+          <a:solidFill>
+            <a:srgbClr val="FFFFFF"/>
+          </a:solidFill>
+          <a:ln>
+            <a:solidFill>
+              <a:srgbClr val="DFE6F2"/>
+            </a:solidFill>
+          </a:ln>
+        </p:spPr>
+        <p:style>
+          <a:lnRef idx="1">
+            <a:schemeClr val="accent1"/>
+          </a:lnRef>
+          <a:fillRef idx="3">
+            <a:schemeClr val="accent1"/>
+          </a:fillRef>
+          <a:effectRef idx="2">
+            <a:schemeClr val="accent1"/>
+          </a:effectRef>
+          <a:fontRef idx="minor">
+            <a:schemeClr val="lt1"/>
+          </a:fontRef>
+        </p:style>
+        <p:txBody>
+          <a:bodyPr rtlCol="0" anchor="ctr"/>
+          <a:lstStyle/>
+          <a:p>
+            <a:pPr algn="ctr"/>
+          </a:p>
+        </p:txBody>
+      </p:sp>
+      <p:sp>
+        <p:nvSpPr>
+          <p:cNvPr id="7" name="TextBox 6"/>
+          <p:cNvSpPr txBox="1"/>
+          <p:nvPr/>
+        </p:nvSpPr>
+        <p:spPr>
+          <a:xfrm>
+            <a:off x="804672" y="2286000"/>
+            <a:ext cx="2194560" cy="530352"/>
+          </a:xfrm>
+          <a:prstGeom prst="rect">
+            <a:avLst/>
+          </a:prstGeom>
+          <a:noFill/>
+        </p:spPr>
+        <p:txBody>
+          <a:bodyPr wrap="square" lIns="27432" rIns="27432" tIns="27432" bIns="27432">
+            <a:spAutoFit/>
+          </a:bodyPr>
+          <a:lstStyle/>
+          <a:p>
+            <a:pPr>
+              <a:defRPr sz="2700" b="1">
+                <a:solidFill>
+                  <a:srgbClr val="375A9C"/>
+                </a:solidFill>
+                <a:latin typeface="Aptos"/>
+              </a:defRPr>
+            </a:pPr>
+            <a:r>
+              <a:t>+71,7%</a:t>
+            </a:r>
+          </a:p>
+        </p:txBody>
+      </p:sp>
+      <p:sp>
+        <p:nvSpPr>
+          <p:cNvPr id="8" name="TextBox 7"/>
+          <p:cNvSpPr txBox="1"/>
+          <p:nvPr/>
+        </p:nvSpPr>
+        <p:spPr>
+          <a:xfrm>
+            <a:off x="3063240" y="2340864"/>
+            <a:ext cx="2834640" cy="274320"/>
+          </a:xfrm>
+          <a:prstGeom prst="rect">
+            <a:avLst/>
+          </a:prstGeom>
+          <a:noFill/>
+        </p:spPr>
+        <p:txBody>
+          <a:bodyPr wrap="square" lIns="27432" rIns="27432" tIns="27432" bIns="27432">
+            <a:spAutoFit/>
+          </a:bodyPr>
+          <a:lstStyle/>
+          <a:p>
+            <a:pPr>
+              <a:defRPr sz="1300" b="1">
+                <a:solidFill>
+                  <a:srgbClr val="192448"/>
+                </a:solidFill>
+                <a:latin typeface="Aptos"/>
+              </a:defRPr>
+            </a:pPr>
+            <a:r>
+              <a:t>Alcance Instagram</a:t>
+            </a:r>
+          </a:p>
+        </p:txBody>
+      </p:sp>
+      <p:sp>
+        <p:nvSpPr>
+          <p:cNvPr id="9" name="TextBox 8"/>
+          <p:cNvSpPr txBox="1"/>
+          <p:nvPr/>
+        </p:nvSpPr>
+        <p:spPr>
+          <a:xfrm>
+            <a:off x="3063240" y="2670048"/>
+            <a:ext cx="2834640" cy="310896"/>
+          </a:xfrm>
+          <a:prstGeom prst="rect">
+            <a:avLst/>
+          </a:prstGeom>
+          <a:noFill/>
+        </p:spPr>
+        <p:txBody>
+          <a:bodyPr wrap="square" lIns="27432" rIns="27432" tIns="27432" bIns="27432">
+            <a:spAutoFit/>
+          </a:bodyPr>
+          <a:lstStyle/>
+          <a:p>
+            <a:pPr>
+              <a:defRPr sz="1100" b="0">
+                <a:solidFill>
+                  <a:srgbClr val="52627D"/>
+                </a:solidFill>
+                <a:latin typeface="Aptos"/>
+              </a:defRPr>
+            </a:pPr>
+            <a:r>
+              <a:t>79,4 mil → 136,3 mil</a:t>
+            </a:r>
+          </a:p>
+        </p:txBody>
+      </p:sp>
+      <p:sp>
+        <p:nvSpPr>
+          <p:cNvPr id="10" name="Rounded Rectangle 9"/>
+          <p:cNvSpPr/>
+          <p:nvPr/>
+        </p:nvSpPr>
+        <p:spPr>
+          <a:xfrm>
+            <a:off x="6254496" y="2148840"/>
+            <a:ext cx="5440680" cy="1243584"/>
+          </a:xfrm>
+          <a:prstGeom prst="roundRect">
+            <a:avLst>
+              <a:gd name="adj" fmla="val 12000"/>
+            </a:avLst>
+          </a:prstGeom>
+          <a:solidFill>
+            <a:srgbClr val="FFFFFF"/>
+          </a:solidFill>
+          <a:ln>
+            <a:solidFill>
+              <a:srgbClr val="DFE6F2"/>
+            </a:solidFill>
+          </a:ln>
+        </p:spPr>
+        <p:style>
+          <a:lnRef idx="1">
+            <a:schemeClr val="accent1"/>
+          </a:lnRef>
+          <a:fillRef idx="3">
+            <a:schemeClr val="accent1"/>
+          </a:fillRef>
+          <a:effectRef idx="2">
+            <a:schemeClr val="accent1"/>
+          </a:effectRef>
+          <a:fontRef idx="minor">
+            <a:schemeClr val="lt1"/>
+          </a:fontRef>
+        </p:style>
+        <p:txBody>
+          <a:bodyPr rtlCol="0" anchor="ctr"/>
+          <a:lstStyle/>
+          <a:p>
+            <a:pPr algn="ctr"/>
+          </a:p>
+        </p:txBody>
+      </p:sp>
+      <p:sp>
+        <p:nvSpPr>
+          <p:cNvPr id="11" name="TextBox 10"/>
+          <p:cNvSpPr txBox="1"/>
+          <p:nvPr/>
+        </p:nvSpPr>
+        <p:spPr>
+          <a:xfrm>
+            <a:off x="6473952" y="2286000"/>
+            <a:ext cx="2194560" cy="530352"/>
+          </a:xfrm>
+          <a:prstGeom prst="rect">
+            <a:avLst/>
+          </a:prstGeom>
+          <a:noFill/>
+        </p:spPr>
+        <p:txBody>
+          <a:bodyPr wrap="square" lIns="27432" rIns="27432" tIns="27432" bIns="27432">
+            <a:spAutoFit/>
+          </a:bodyPr>
+          <a:lstStyle/>
+          <a:p>
+            <a:pPr>
+              <a:defRPr sz="2700" b="1">
+                <a:solidFill>
+                  <a:srgbClr val="375A9C"/>
+                </a:solidFill>
+                <a:latin typeface="Aptos"/>
+              </a:defRPr>
+            </a:pPr>
+            <a:r>
+              <a:t>+288,4%</a:t>
+            </a:r>
+          </a:p>
+        </p:txBody>
+      </p:sp>
+      <p:sp>
+        <p:nvSpPr>
+          <p:cNvPr id="12" name="TextBox 11"/>
+          <p:cNvSpPr txBox="1"/>
+          <p:nvPr/>
+        </p:nvSpPr>
+        <p:spPr>
+          <a:xfrm>
+            <a:off x="8732520" y="2340864"/>
+            <a:ext cx="2834640" cy="274320"/>
+          </a:xfrm>
+          <a:prstGeom prst="rect">
+            <a:avLst/>
+          </a:prstGeom>
+          <a:noFill/>
+        </p:spPr>
+        <p:txBody>
+          <a:bodyPr wrap="square" lIns="27432" rIns="27432" tIns="27432" bIns="27432">
+            <a:spAutoFit/>
+          </a:bodyPr>
+          <a:lstStyle/>
+          <a:p>
+            <a:pPr>
+              <a:defRPr sz="1300" b="1">
+                <a:solidFill>
+                  <a:srgbClr val="192448"/>
+                </a:solidFill>
+                <a:latin typeface="Aptos"/>
+              </a:defRPr>
+            </a:pPr>
+            <a:r>
+              <a:t>Visualizadores Facebook</a:t>
+            </a:r>
+          </a:p>
+        </p:txBody>
+      </p:sp>
+      <p:sp>
+        <p:nvSpPr>
+          <p:cNvPr id="13" name="TextBox 12"/>
+          <p:cNvSpPr txBox="1"/>
+          <p:nvPr/>
+        </p:nvSpPr>
+        <p:spPr>
+          <a:xfrm>
+            <a:off x="8732520" y="2670048"/>
+            <a:ext cx="2834640" cy="310896"/>
+          </a:xfrm>
+          <a:prstGeom prst="rect">
+            <a:avLst/>
+          </a:prstGeom>
+          <a:noFill/>
+        </p:spPr>
+        <p:txBody>
+          <a:bodyPr wrap="square" lIns="27432" rIns="27432" tIns="27432" bIns="27432">
+            <a:spAutoFit/>
+          </a:bodyPr>
+          <a:lstStyle/>
+          <a:p>
+            <a:pPr>
+              <a:defRPr sz="1100" b="0">
+                <a:solidFill>
+                  <a:srgbClr val="52627D"/>
+                </a:solidFill>
+                <a:latin typeface="Aptos"/>
+              </a:defRPr>
+            </a:pPr>
+            <a:r>
+              <a:t>45,7 mil → 177,5 mil</a:t>
+            </a:r>
+          </a:p>
+        </p:txBody>
+      </p:sp>
+      <p:sp>
+        <p:nvSpPr>
+          <p:cNvPr id="14" name="Rounded Rectangle 13"/>
+          <p:cNvSpPr/>
+          <p:nvPr/>
+        </p:nvSpPr>
+        <p:spPr>
+          <a:xfrm>
+            <a:off x="585216" y="3547872"/>
+            <a:ext cx="5440680" cy="1243584"/>
+          </a:xfrm>
+          <a:prstGeom prst="roundRect">
+            <a:avLst>
+              <a:gd name="adj" fmla="val 12000"/>
+            </a:avLst>
+          </a:prstGeom>
+          <a:solidFill>
+            <a:srgbClr val="FFFFFF"/>
+          </a:solidFill>
+          <a:ln>
+            <a:solidFill>
+              <a:srgbClr val="DFE6F2"/>
+            </a:solidFill>
+          </a:ln>
+        </p:spPr>
+        <p:style>
+          <a:lnRef idx="1">
+            <a:schemeClr val="accent1"/>
+          </a:lnRef>
+          <a:fillRef idx="3">
+            <a:schemeClr val="accent1"/>
+          </a:fillRef>
+          <a:effectRef idx="2">
+            <a:schemeClr val="accent1"/>
+          </a:effectRef>
+          <a:fontRef idx="minor">
+            <a:schemeClr val="lt1"/>
+          </a:fontRef>
+        </p:style>
+        <p:txBody>
+          <a:bodyPr rtlCol="0" anchor="ctr"/>
+          <a:lstStyle/>
+          <a:p>
+            <a:pPr algn="ctr"/>
+          </a:p>
+        </p:txBody>
+      </p:sp>
+      <p:sp>
+        <p:nvSpPr>
+          <p:cNvPr id="15" name="TextBox 14"/>
+          <p:cNvSpPr txBox="1"/>
+          <p:nvPr/>
+        </p:nvSpPr>
+        <p:spPr>
+          <a:xfrm>
+            <a:off x="804672" y="3685032"/>
+            <a:ext cx="2194560" cy="530352"/>
+          </a:xfrm>
+          <a:prstGeom prst="rect">
+            <a:avLst/>
+          </a:prstGeom>
+          <a:noFill/>
+        </p:spPr>
+        <p:txBody>
+          <a:bodyPr wrap="square" lIns="27432" rIns="27432" tIns="27432" bIns="27432">
+            <a:spAutoFit/>
+          </a:bodyPr>
+          <a:lstStyle/>
+          <a:p>
+            <a:pPr>
+              <a:defRPr sz="2700" b="1">
+                <a:solidFill>
+                  <a:srgbClr val="375A9C"/>
+                </a:solidFill>
+                <a:latin typeface="Aptos"/>
+              </a:defRPr>
+            </a:pPr>
+            <a:r>
+              <a:t>+92,8%</a:t>
+            </a:r>
+          </a:p>
+        </p:txBody>
+      </p:sp>
+      <p:sp>
+        <p:nvSpPr>
+          <p:cNvPr id="16" name="TextBox 15"/>
+          <p:cNvSpPr txBox="1"/>
+          <p:nvPr/>
+        </p:nvSpPr>
+        <p:spPr>
+          <a:xfrm>
+            <a:off x="3063240" y="3739896"/>
+            <a:ext cx="2834640" cy="274320"/>
+          </a:xfrm>
+          <a:prstGeom prst="rect">
+            <a:avLst/>
+          </a:prstGeom>
+          <a:noFill/>
+        </p:spPr>
+        <p:txBody>
+          <a:bodyPr wrap="square" lIns="27432" rIns="27432" tIns="27432" bIns="27432">
+            <a:spAutoFit/>
+          </a:bodyPr>
+          <a:lstStyle/>
+          <a:p>
+            <a:pPr>
+              <a:defRPr sz="1300" b="1">
+                <a:solidFill>
+                  <a:srgbClr val="192448"/>
+                </a:solidFill>
+                <a:latin typeface="Aptos"/>
+              </a:defRPr>
+            </a:pPr>
+            <a:r>
+              <a:t>Interações Instagram</a:t>
+            </a:r>
+          </a:p>
+        </p:txBody>
+      </p:sp>
+      <p:sp>
+        <p:nvSpPr>
+          <p:cNvPr id="17" name="TextBox 16"/>
+          <p:cNvSpPr txBox="1"/>
+          <p:nvPr/>
+        </p:nvSpPr>
+        <p:spPr>
+          <a:xfrm>
+            <a:off x="3063240" y="4069080"/>
+            <a:ext cx="2834640" cy="310896"/>
+          </a:xfrm>
+          <a:prstGeom prst="rect">
+            <a:avLst/>
+          </a:prstGeom>
+          <a:noFill/>
+        </p:spPr>
+        <p:txBody>
+          <a:bodyPr wrap="square" lIns="27432" rIns="27432" tIns="27432" bIns="27432">
+            <a:spAutoFit/>
+          </a:bodyPr>
+          <a:lstStyle/>
+          <a:p>
+            <a:pPr>
+              <a:defRPr sz="1100" b="0">
+                <a:solidFill>
+                  <a:srgbClr val="52627D"/>
+                </a:solidFill>
+                <a:latin typeface="Aptos"/>
+              </a:defRPr>
+            </a:pPr>
+            <a:r>
+              <a:t>2.883 → 5.557</a:t>
+            </a:r>
+          </a:p>
+        </p:txBody>
+      </p:sp>
+      <p:sp>
+        <p:nvSpPr>
+          <p:cNvPr id="18" name="Rounded Rectangle 17"/>
+          <p:cNvSpPr/>
+          <p:nvPr/>
+        </p:nvSpPr>
+        <p:spPr>
+          <a:xfrm>
+            <a:off x="6254496" y="3547872"/>
+            <a:ext cx="5440680" cy="1243584"/>
+          </a:xfrm>
+          <a:prstGeom prst="roundRect">
+            <a:avLst>
+              <a:gd name="adj" fmla="val 12000"/>
+            </a:avLst>
+          </a:prstGeom>
+          <a:solidFill>
+            <a:srgbClr val="FFFFFF"/>
+          </a:solidFill>
+          <a:ln>
+            <a:solidFill>
+              <a:srgbClr val="DFE6F2"/>
+            </a:solidFill>
+          </a:ln>
+        </p:spPr>
+        <p:style>
+          <a:lnRef idx="1">
+            <a:schemeClr val="accent1"/>
+          </a:lnRef>
+          <a:fillRef idx="3">
+            <a:schemeClr val="accent1"/>
+          </a:fillRef>
+          <a:effectRef idx="2">
+            <a:schemeClr val="accent1"/>
+          </a:effectRef>
+          <a:fontRef idx="minor">
+            <a:schemeClr val="lt1"/>
+          </a:fontRef>
+        </p:style>
+        <p:txBody>
+          <a:bodyPr rtlCol="0" anchor="ctr"/>
+          <a:lstStyle/>
+          <a:p>
+            <a:pPr algn="ctr"/>
+          </a:p>
+        </p:txBody>
+      </p:sp>
+      <p:sp>
+        <p:nvSpPr>
+          <p:cNvPr id="19" name="TextBox 18"/>
+          <p:cNvSpPr txBox="1"/>
+          <p:nvPr/>
+        </p:nvSpPr>
+        <p:spPr>
+          <a:xfrm>
+            <a:off x="6473952" y="3685032"/>
+            <a:ext cx="2194560" cy="530352"/>
+          </a:xfrm>
+          <a:prstGeom prst="rect">
+            <a:avLst/>
+          </a:prstGeom>
+          <a:noFill/>
+        </p:spPr>
+        <p:txBody>
+          <a:bodyPr wrap="square" lIns="27432" rIns="27432" tIns="27432" bIns="27432">
+            <a:spAutoFit/>
+          </a:bodyPr>
+          <a:lstStyle/>
+          <a:p>
+            <a:pPr>
+              <a:defRPr sz="2700" b="1">
+                <a:solidFill>
+                  <a:srgbClr val="375A9C"/>
+                </a:solidFill>
+                <a:latin typeface="Aptos"/>
+              </a:defRPr>
+            </a:pPr>
+            <a:r>
+              <a:t>+363,5%</a:t>
+            </a:r>
+          </a:p>
+        </p:txBody>
+      </p:sp>
+      <p:sp>
+        <p:nvSpPr>
+          <p:cNvPr id="20" name="TextBox 19"/>
+          <p:cNvSpPr txBox="1"/>
+          <p:nvPr/>
+        </p:nvSpPr>
+        <p:spPr>
+          <a:xfrm>
+            <a:off x="8732520" y="3739896"/>
+            <a:ext cx="2834640" cy="274320"/>
+          </a:xfrm>
+          <a:prstGeom prst="rect">
+            <a:avLst/>
+          </a:prstGeom>
+          <a:noFill/>
+        </p:spPr>
+        <p:txBody>
+          <a:bodyPr wrap="square" lIns="27432" rIns="27432" tIns="27432" bIns="27432">
+            <a:spAutoFit/>
+          </a:bodyPr>
+          <a:lstStyle/>
+          <a:p>
+            <a:pPr>
+              <a:defRPr sz="1300" b="1">
+                <a:solidFill>
+                  <a:srgbClr val="192448"/>
+                </a:solidFill>
+                <a:latin typeface="Aptos"/>
+              </a:defRPr>
+            </a:pPr>
+            <a:r>
+              <a:t>Interações Facebook</a:t>
+            </a:r>
+          </a:p>
+        </p:txBody>
+      </p:sp>
+      <p:sp>
+        <p:nvSpPr>
+          <p:cNvPr id="21" name="TextBox 20"/>
+          <p:cNvSpPr txBox="1"/>
+          <p:nvPr/>
+        </p:nvSpPr>
+        <p:spPr>
+          <a:xfrm>
+            <a:off x="8732520" y="4069080"/>
+            <a:ext cx="2834640" cy="310896"/>
+          </a:xfrm>
+          <a:prstGeom prst="rect">
+            <a:avLst/>
+          </a:prstGeom>
+          <a:noFill/>
+        </p:spPr>
+        <p:txBody>
+          <a:bodyPr wrap="square" lIns="27432" rIns="27432" tIns="27432" bIns="27432">
+            <a:spAutoFit/>
+          </a:bodyPr>
+          <a:lstStyle/>
+          <a:p>
+            <a:pPr>
+              <a:defRPr sz="1100" b="0">
+                <a:solidFill>
+                  <a:srgbClr val="52627D"/>
+                </a:solidFill>
+                <a:latin typeface="Aptos"/>
+              </a:defRPr>
+            </a:pPr>
+            <a:r>
+              <a:t>665 → 3.082</a:t>
+            </a:r>
+          </a:p>
+        </p:txBody>
+      </p:sp>
+      <p:sp>
+        <p:nvSpPr>
+          <p:cNvPr id="22" name="Rounded Rectangle 21"/>
+          <p:cNvSpPr/>
+          <p:nvPr/>
+        </p:nvSpPr>
+        <p:spPr>
+          <a:xfrm>
+            <a:off x="585216" y="5084064"/>
+            <a:ext cx="11027664" cy="1097280"/>
+          </a:xfrm>
+          <a:prstGeom prst="roundRect">
+            <a:avLst>
+              <a:gd name="adj" fmla="val 12000"/>
+            </a:avLst>
+          </a:prstGeom>
+          <a:solidFill>
+            <a:srgbClr val="E7EFFB"/>
+          </a:solidFill>
+          <a:ln>
+            <a:noFill/>
+          </a:ln>
+        </p:spPr>
+        <p:style>
+          <a:lnRef idx="1">
+            <a:schemeClr val="accent1"/>
+          </a:lnRef>
+          <a:fillRef idx="3">
+            <a:schemeClr val="accent1"/>
+          </a:fillRef>
+          <a:effectRef idx="2">
+            <a:schemeClr val="accent1"/>
+          </a:effectRef>
+          <a:fontRef idx="minor">
+            <a:schemeClr val="lt1"/>
+          </a:fontRef>
+        </p:style>
+        <p:txBody>
+          <a:bodyPr rtlCol="0" anchor="ctr"/>
+          <a:lstStyle/>
+          <a:p>
+            <a:pPr algn="ctr"/>
+          </a:p>
+        </p:txBody>
+      </p:sp>
+      <p:sp>
+        <p:nvSpPr>
+          <p:cNvPr id="23" name="TextBox 22"/>
+          <p:cNvSpPr txBox="1"/>
+          <p:nvPr/>
+        </p:nvSpPr>
+        <p:spPr>
+          <a:xfrm>
+            <a:off x="768096" y="5202936"/>
+            <a:ext cx="10607040" cy="841248"/>
+          </a:xfrm>
+          <a:prstGeom prst="rect">
+            <a:avLst/>
+          </a:prstGeom>
+          <a:noFill/>
+        </p:spPr>
+        <p:txBody>
+          <a:bodyPr wrap="square" lIns="27432" rIns="27432" tIns="27432" bIns="27432">
+            <a:spAutoFit/>
+          </a:bodyPr>
+          <a:lstStyle/>
+          <a:p>
+            <a:pPr>
+              <a:defRPr sz="1300" b="0">
+                <a:solidFill>
+                  <a:srgbClr val="192448"/>
+                </a:solidFill>
+                <a:latin typeface="Aptos"/>
+              </a:defRPr>
+            </a:pPr>
+            <a:r>
+              <a:t>LEITURA  |  O investimento expandiu o potencial de distribuição. Como não há análise de atribuição específica, os aumentos observados não podem ser creditados exclusivamente aos anúncios. Os picos de março/abril mostram também a força do conteúdo.</a:t>
+            </a:r>
+          </a:p>
+        </p:txBody>
+      </p:sp>
+      <p:sp>
+        <p:nvSpPr>
+          <p:cNvPr id="24" name="TextBox 23"/>
+          <p:cNvSpPr txBox="1"/>
+          <p:nvPr/>
+        </p:nvSpPr>
+        <p:spPr>
+          <a:xfrm>
+            <a:off x="548640" y="6565392"/>
+            <a:ext cx="9875520" cy="164592"/>
+          </a:xfrm>
+          <a:prstGeom prst="rect">
+            <a:avLst/>
+          </a:prstGeom>
+          <a:noFill/>
+        </p:spPr>
+        <p:txBody>
+          <a:bodyPr wrap="square" lIns="27432" rIns="27432" tIns="27432" bIns="27432">
+            <a:spAutoFit/>
+          </a:bodyPr>
+          <a:lstStyle/>
+          <a:p>
+            <a:pPr>
+              <a:defRPr sz="800" b="0">
+                <a:solidFill>
+                  <a:srgbClr val="67738E"/>
+                </a:solidFill>
+                <a:latin typeface="Aptos"/>
+              </a:defRPr>
+            </a:pPr>
+            <a:r>
+              <a:t>Fontes: Meta Business Suite (séries mensais) e controle de mídia DAE (17/07–29/09).</a:t>
+            </a:r>
+          </a:p>
+        </p:txBody>
+      </p:sp>
+      <p:sp>
+        <p:nvSpPr>
+          <p:cNvPr id="25" name="TextBox 24"/>
+          <p:cNvSpPr txBox="1"/>
+          <p:nvPr/>
+        </p:nvSpPr>
+        <p:spPr>
+          <a:xfrm>
+            <a:off x="10424160" y="6565392"/>
+            <a:ext cx="1216152" cy="164592"/>
+          </a:xfrm>
+          <a:prstGeom prst="rect">
+            <a:avLst/>
+          </a:prstGeom>
+          <a:noFill/>
+        </p:spPr>
+        <p:txBody>
+          <a:bodyPr wrap="square" lIns="27432" rIns="27432" tIns="27432" bIns="27432">
+            <a:spAutoFit/>
+          </a:bodyPr>
+          <a:lstStyle/>
+          <a:p>
+            <a:pPr>
+              <a:defRPr sz="780" b="0">
+                <a:solidFill>
+                  <a:srgbClr val="67738E"/>
+                </a:solidFill>
+                <a:latin typeface="Aptos"/>
+              </a:defRPr>
+            </a:pPr>
+            <a:r>
+              <a:rPr sz="800">
+                <a:solidFill>
+                  <a:srgbClr val="67738E"/>
+                </a:solidFill>
+                <a:latin typeface="Aptos"/>
+              </a:rPr>
+              <a:t>Apuração: 19/10/2026 | 07 / 08</a:t>
+            </a:r>
           </a:p>
         </p:txBody>
       </p:sp>
